--- a/oil_heating.pptx
+++ b/oil_heating.pptx
@@ -8,7 +8,9 @@
     <p:sldId id="256" r:id="rId2"/>
     <p:sldId id="257" r:id="rId3"/>
     <p:sldId id="258" r:id="rId4"/>
-    <p:sldId id="259" r:id="rId5"/>
+    <p:sldId id="261" r:id="rId5"/>
+    <p:sldId id="259" r:id="rId6"/>
+    <p:sldId id="260" r:id="rId7"/>
   </p:sldIdLst>
   <p:sldSz cx="12192000" cy="6858000"/>
   <p:notesSz cx="6858000" cy="9144000"/>
@@ -261,7 +263,7 @@
           <a:lstStyle/>
           <a:p>
             <a:fld id="{5F491023-0B0A-7041-9F06-D25A50EF063B}" type="datetimeFigureOut">
-              <a:t>11/25/22</a:t>
+              <a:t>11/27/22</a:t>
             </a:fld>
             <a:endParaRPr lang="en-US"/>
           </a:p>
@@ -457,7 +459,7 @@
           <a:lstStyle/>
           <a:p>
             <a:fld id="{5F491023-0B0A-7041-9F06-D25A50EF063B}" type="datetimeFigureOut">
-              <a:t>11/25/22</a:t>
+              <a:t>11/27/22</a:t>
             </a:fld>
             <a:endParaRPr lang="en-US"/>
           </a:p>
@@ -663,7 +665,7 @@
           <a:lstStyle/>
           <a:p>
             <a:fld id="{5F491023-0B0A-7041-9F06-D25A50EF063B}" type="datetimeFigureOut">
-              <a:t>11/25/22</a:t>
+              <a:t>11/27/22</a:t>
             </a:fld>
             <a:endParaRPr lang="en-US"/>
           </a:p>
@@ -859,7 +861,7 @@
           <a:lstStyle/>
           <a:p>
             <a:fld id="{5F491023-0B0A-7041-9F06-D25A50EF063B}" type="datetimeFigureOut">
-              <a:t>11/25/22</a:t>
+              <a:t>11/27/22</a:t>
             </a:fld>
             <a:endParaRPr lang="en-US"/>
           </a:p>
@@ -1132,7 +1134,7 @@
           <a:lstStyle/>
           <a:p>
             <a:fld id="{5F491023-0B0A-7041-9F06-D25A50EF063B}" type="datetimeFigureOut">
-              <a:t>11/25/22</a:t>
+              <a:t>11/27/22</a:t>
             </a:fld>
             <a:endParaRPr lang="en-US"/>
           </a:p>
@@ -1395,7 +1397,7 @@
           <a:lstStyle/>
           <a:p>
             <a:fld id="{5F491023-0B0A-7041-9F06-D25A50EF063B}" type="datetimeFigureOut">
-              <a:t>11/25/22</a:t>
+              <a:t>11/27/22</a:t>
             </a:fld>
             <a:endParaRPr lang="en-US"/>
           </a:p>
@@ -1805,7 +1807,7 @@
           <a:lstStyle/>
           <a:p>
             <a:fld id="{5F491023-0B0A-7041-9F06-D25A50EF063B}" type="datetimeFigureOut">
-              <a:t>11/25/22</a:t>
+              <a:t>11/27/22</a:t>
             </a:fld>
             <a:endParaRPr lang="en-US"/>
           </a:p>
@@ -1944,7 +1946,7 @@
           <a:lstStyle/>
           <a:p>
             <a:fld id="{5F491023-0B0A-7041-9F06-D25A50EF063B}" type="datetimeFigureOut">
-              <a:t>11/25/22</a:t>
+              <a:t>11/27/22</a:t>
             </a:fld>
             <a:endParaRPr lang="en-US"/>
           </a:p>
@@ -2055,7 +2057,7 @@
           <a:lstStyle/>
           <a:p>
             <a:fld id="{5F491023-0B0A-7041-9F06-D25A50EF063B}" type="datetimeFigureOut">
-              <a:t>11/25/22</a:t>
+              <a:t>11/27/22</a:t>
             </a:fld>
             <a:endParaRPr lang="en-US"/>
           </a:p>
@@ -2364,7 +2366,7 @@
           <a:lstStyle/>
           <a:p>
             <a:fld id="{5F491023-0B0A-7041-9F06-D25A50EF063B}" type="datetimeFigureOut">
-              <a:t>11/25/22</a:t>
+              <a:t>11/27/22</a:t>
             </a:fld>
             <a:endParaRPr lang="en-US"/>
           </a:p>
@@ -2650,7 +2652,7 @@
           <a:lstStyle/>
           <a:p>
             <a:fld id="{5F491023-0B0A-7041-9F06-D25A50EF063B}" type="datetimeFigureOut">
-              <a:t>11/25/22</a:t>
+              <a:t>11/27/22</a:t>
             </a:fld>
             <a:endParaRPr lang="en-US"/>
           </a:p>
@@ -2889,7 +2891,7 @@
           </a:lstStyle>
           <a:p>
             <a:fld id="{5F491023-0B0A-7041-9F06-D25A50EF063B}" type="datetimeFigureOut">
-              <a:t>11/25/22</a:t>
+              <a:t>11/27/22</a:t>
             </a:fld>
             <a:endParaRPr lang="en-US"/>
           </a:p>
@@ -15254,43 +15256,8 @@
         </p:blipFill>
         <p:spPr>
           <a:xfrm>
-            <a:off x="4229459" y="1076618"/>
-            <a:ext cx="2920088" cy="1080173"/>
-          </a:xfrm>
-          <a:prstGeom prst="rect">
-            <a:avLst/>
-          </a:prstGeom>
-        </p:spPr>
-      </p:pic>
-      <p:pic>
-        <p:nvPicPr>
-          <p:cNvPr id="6" name="Picture 5">
-            <a:extLst>
-              <a:ext uri="{FF2B5EF4-FFF2-40B4-BE49-F238E27FC236}">
-                <a16:creationId xmlns:a16="http://schemas.microsoft.com/office/drawing/2014/main" id="{9AA7E65F-19E0-3F74-17B8-0F5395E5E2E5}"/>
-              </a:ext>
-            </a:extLst>
-          </p:cNvPr>
-          <p:cNvPicPr>
-            <a:picLocks noChangeAspect="1"/>
-          </p:cNvPicPr>
-          <p:nvPr/>
-        </p:nvPicPr>
-        <p:blipFill rotWithShape="1">
-          <a:blip r:embed="rId4" cstate="email">
-            <a:extLst>
-              <a:ext uri="{28A0092B-C50C-407E-A947-70E740481C1C}">
-                <a14:useLocalDpi xmlns:a14="http://schemas.microsoft.com/office/drawing/2010/main"/>
-              </a:ext>
-            </a:extLst>
-          </a:blip>
-          <a:srcRect/>
-          <a:stretch/>
-        </p:blipFill>
-        <p:spPr>
-          <a:xfrm>
-            <a:off x="4229460" y="2254528"/>
-            <a:ext cx="2981303" cy="2446682"/>
+            <a:off x="4107287" y="823302"/>
+            <a:ext cx="3781727" cy="1398903"/>
           </a:xfrm>
           <a:prstGeom prst="rect">
             <a:avLst/>
@@ -15312,7 +15279,7 @@
           <p:nvPr/>
         </p:nvPicPr>
         <p:blipFill>
-          <a:blip r:embed="rId5" cstate="email">
+          <a:blip r:embed="rId4" cstate="email">
             <a:extLst>
               <a:ext uri="{28A0092B-C50C-407E-A947-70E740481C1C}">
                 <a14:useLocalDpi xmlns:a14="http://schemas.microsoft.com/office/drawing/2010/main"/>
@@ -15348,7 +15315,7 @@
           <p:nvPr/>
         </p:nvPicPr>
         <p:blipFill>
-          <a:blip r:embed="rId6" cstate="email">
+          <a:blip r:embed="rId5" cstate="email">
             <a:extLst>
               <a:ext uri="{28A0092B-C50C-407E-A947-70E740481C1C}">
                 <a14:useLocalDpi xmlns:a14="http://schemas.microsoft.com/office/drawing/2010/main"/>
@@ -15363,42 +15330,6 @@
           <a:xfrm>
             <a:off x="10218969" y="4596545"/>
             <a:ext cx="1879231" cy="2104501"/>
-          </a:xfrm>
-          <a:prstGeom prst="rect">
-            <a:avLst/>
-          </a:prstGeom>
-        </p:spPr>
-      </p:pic>
-      <p:pic>
-        <p:nvPicPr>
-          <p:cNvPr id="9" name="Picture 8">
-            <a:extLst>
-              <a:ext uri="{FF2B5EF4-FFF2-40B4-BE49-F238E27FC236}">
-                <a16:creationId xmlns:a16="http://schemas.microsoft.com/office/drawing/2014/main" id="{7D3BA3C0-F7BB-8D47-FD9C-3E5C47A1B687}"/>
-              </a:ext>
-            </a:extLst>
-          </p:cNvPr>
-          <p:cNvPicPr>
-            <a:picLocks noChangeAspect="1"/>
-          </p:cNvPicPr>
-          <p:nvPr/>
-        </p:nvPicPr>
-        <p:blipFill>
-          <a:blip r:embed="rId7" cstate="email">
-            <a:extLst>
-              <a:ext uri="{28A0092B-C50C-407E-A947-70E740481C1C}">
-                <a14:useLocalDpi xmlns:a14="http://schemas.microsoft.com/office/drawing/2010/main"/>
-              </a:ext>
-            </a:extLst>
-          </a:blip>
-          <a:stretch>
-            <a:fillRect/>
-          </a:stretch>
-        </p:blipFill>
-        <p:spPr>
-          <a:xfrm>
-            <a:off x="4243872" y="63195"/>
-            <a:ext cx="1745842" cy="915686"/>
           </a:xfrm>
           <a:prstGeom prst="rect">
             <a:avLst/>
@@ -15420,7 +15351,7 @@
         <p:spPr>
           <a:xfrm>
             <a:off x="0" y="523220"/>
-            <a:ext cx="2266121" cy="261610"/>
+            <a:ext cx="3951426" cy="600164"/>
           </a:xfrm>
           <a:prstGeom prst="rect">
             <a:avLst/>
@@ -15433,19 +15364,67 @@
           </a:bodyPr>
           <a:lstStyle/>
           <a:p>
+            <a:pPr marL="171450" indent="-171450">
+              <a:buFont typeface="Arial" panose="020B0604020202020204" pitchFamily="34" charset="0"/>
+              <a:buChar char="•"/>
+            </a:pPr>
             <a:r>
               <a:rPr lang="en-US" sz="1100" dirty="0">
-                <a:hlinkClick r:id="rId8"/>
+                <a:hlinkClick r:id="rId6"/>
+              </a:rPr>
+              <a:t>https://www.peerlessboilers.com</a:t>
+            </a:r>
+            <a:r>
+              <a:rPr lang="en-US" sz="1100" dirty="0"/>
+              <a:t> </a:t>
+            </a:r>
+          </a:p>
+          <a:p>
+            <a:pPr marL="171450" indent="-171450">
+              <a:buFont typeface="Arial" panose="020B0604020202020204" pitchFamily="34" charset="0"/>
+              <a:buChar char="•"/>
+            </a:pPr>
+            <a:r>
+              <a:rPr lang="en-US" sz="1100" dirty="0">
+                <a:hlinkClick r:id="rId7"/>
               </a:rPr>
               <a:t>https://</a:t>
             </a:r>
             <a:r>
               <a:rPr lang="en-US" sz="1100" dirty="0" err="1">
-                <a:hlinkClick r:id="rId8"/>
+                <a:hlinkClick r:id="rId7"/>
               </a:rPr>
-              <a:t>www.peerlessboilers.com</a:t>
+              <a:t>www.youtube.com</a:t>
+            </a:r>
+            <a:r>
+              <a:rPr lang="en-US" sz="1100" dirty="0">
+                <a:hlinkClick r:id="rId7"/>
+              </a:rPr>
+              <a:t>/</a:t>
+            </a:r>
+            <a:r>
+              <a:rPr lang="en-US" sz="1100" dirty="0" err="1">
+                <a:hlinkClick r:id="rId7"/>
+              </a:rPr>
+              <a:t>watch?v</a:t>
+            </a:r>
+            <a:r>
+              <a:rPr lang="en-US" sz="1100" dirty="0">
+                <a:hlinkClick r:id="rId7"/>
+              </a:rPr>
+              <a:t>=5GbXgEYw5TE</a:t>
             </a:r>
             <a:endParaRPr lang="en-US" sz="1100" dirty="0"/>
+          </a:p>
+          <a:p>
+            <a:pPr marL="171450" indent="-171450">
+              <a:buFont typeface="Arial" panose="020B0604020202020204" pitchFamily="34" charset="0"/>
+              <a:buChar char="•"/>
+            </a:pPr>
+            <a:r>
+              <a:rPr lang="en-US" sz="1100" dirty="0"/>
+              <a:t>xxx</a:t>
+            </a:r>
           </a:p>
         </p:txBody>
       </p:sp>
@@ -15463,8 +15442,8 @@
         </p:nvSpPr>
         <p:spPr>
           <a:xfrm>
-            <a:off x="6057248" y="63195"/>
-            <a:ext cx="1441173" cy="523220"/>
+            <a:off x="5646485" y="2806871"/>
+            <a:ext cx="2008957" cy="1169551"/>
           </a:xfrm>
           <a:prstGeom prst="rect">
             <a:avLst/>
@@ -15479,7 +15458,27 @@
           <a:p>
             <a:r>
               <a:rPr lang="en-US" sz="1400" dirty="0"/>
-              <a:t>Honeywell boiler control module</a:t>
+              <a:t>Honeywell boiler </a:t>
+            </a:r>
+            <a:r>
+              <a:rPr lang="en-US" sz="1400" dirty="0" err="1"/>
+              <a:t>aquastat</a:t>
+            </a:r>
+            <a:r>
+              <a:rPr lang="en-US" sz="1400" dirty="0"/>
+              <a:t> (thermostat)</a:t>
+            </a:r>
+          </a:p>
+          <a:p>
+            <a:r>
+              <a:rPr lang="en-US" sz="1400" dirty="0"/>
+              <a:t>sends "more heat" signal</a:t>
+            </a:r>
+          </a:p>
+          <a:p>
+            <a:r>
+              <a:rPr lang="en-US" sz="1400" dirty="0"/>
+              <a:t>to 7505 burner control unit</a:t>
             </a:r>
           </a:p>
         </p:txBody>
@@ -15498,8 +15497,8 @@
         </p:nvSpPr>
         <p:spPr>
           <a:xfrm>
-            <a:off x="6959632" y="4946720"/>
-            <a:ext cx="3132394" cy="1754326"/>
+            <a:off x="6966938" y="4943504"/>
+            <a:ext cx="3125088" cy="1754326"/>
           </a:xfrm>
           <a:prstGeom prst="rect">
             <a:avLst/>
@@ -15530,7 +15529,7 @@
             </a:r>
             <a:r>
               <a:rPr lang="en-US" sz="1200" dirty="0">
-                <a:hlinkClick r:id="rId9"/>
+                <a:hlinkClick r:id="rId8"/>
               </a:rPr>
               <a:t>https://www.beckettcorp.com/product/genisys-7505-oil-burner-control/</a:t>
             </a:r>
@@ -15618,7 +15617,7 @@
           <p:nvPr/>
         </p:nvPicPr>
         <p:blipFill>
-          <a:blip r:embed="rId5" cstate="email">
+          <a:blip r:embed="rId4" cstate="email">
             <a:extLst>
               <a:ext uri="{28A0092B-C50C-407E-A947-70E740481C1C}">
                 <a14:useLocalDpi xmlns:a14="http://schemas.microsoft.com/office/drawing/2010/main"/>
@@ -15633,6 +15632,78 @@
           <a:xfrm>
             <a:off x="8033656" y="131652"/>
             <a:ext cx="4064543" cy="4375704"/>
+          </a:xfrm>
+          <a:prstGeom prst="rect">
+            <a:avLst/>
+          </a:prstGeom>
+        </p:spPr>
+      </p:pic>
+      <p:pic>
+        <p:nvPicPr>
+          <p:cNvPr id="3" name="Picture 2">
+            <a:extLst>
+              <a:ext uri="{FF2B5EF4-FFF2-40B4-BE49-F238E27FC236}">
+                <a16:creationId xmlns:a16="http://schemas.microsoft.com/office/drawing/2014/main" id="{C6EC3B41-13DA-CF7B-479F-5236CCD33E77}"/>
+              </a:ext>
+            </a:extLst>
+          </p:cNvPr>
+          <p:cNvPicPr>
+            <a:picLocks noChangeAspect="1"/>
+          </p:cNvPicPr>
+          <p:nvPr/>
+        </p:nvPicPr>
+        <p:blipFill>
+          <a:blip r:embed="rId9" cstate="email">
+            <a:extLst>
+              <a:ext uri="{28A0092B-C50C-407E-A947-70E740481C1C}">
+                <a14:useLocalDpi xmlns:a14="http://schemas.microsoft.com/office/drawing/2010/main"/>
+              </a:ext>
+            </a:extLst>
+          </a:blip>
+          <a:stretch>
+            <a:fillRect/>
+          </a:stretch>
+        </p:blipFill>
+        <p:spPr>
+          <a:xfrm>
+            <a:off x="4078369" y="2806871"/>
+            <a:ext cx="1441173" cy="978657"/>
+          </a:xfrm>
+          <a:prstGeom prst="rect">
+            <a:avLst/>
+          </a:prstGeom>
+        </p:spPr>
+      </p:pic>
+      <p:pic>
+        <p:nvPicPr>
+          <p:cNvPr id="11" name="Picture 10">
+            <a:extLst>
+              <a:ext uri="{FF2B5EF4-FFF2-40B4-BE49-F238E27FC236}">
+                <a16:creationId xmlns:a16="http://schemas.microsoft.com/office/drawing/2014/main" id="{9CDEC992-7AAE-FD85-346F-0AA5C8C3029D}"/>
+              </a:ext>
+            </a:extLst>
+          </p:cNvPr>
+          <p:cNvPicPr>
+            <a:picLocks noChangeAspect="1"/>
+          </p:cNvPicPr>
+          <p:nvPr/>
+        </p:nvPicPr>
+        <p:blipFill>
+          <a:blip r:embed="rId10" cstate="email">
+            <a:extLst>
+              <a:ext uri="{28A0092B-C50C-407E-A947-70E740481C1C}">
+                <a14:useLocalDpi xmlns:a14="http://schemas.microsoft.com/office/drawing/2010/main"/>
+              </a:ext>
+            </a:extLst>
+          </a:blip>
+          <a:stretch>
+            <a:fillRect/>
+          </a:stretch>
+        </p:blipFill>
+        <p:spPr>
+          <a:xfrm>
+            <a:off x="4078369" y="4210493"/>
+            <a:ext cx="2761626" cy="2562470"/>
           </a:xfrm>
           <a:prstGeom prst="rect">
             <a:avLst/>
@@ -15683,8 +15754,8 @@
         </p:nvSpPr>
         <p:spPr>
           <a:xfrm>
-            <a:off x="367747" y="467140"/>
-            <a:ext cx="4929810" cy="1169551"/>
+            <a:off x="0" y="0"/>
+            <a:ext cx="3721395" cy="523220"/>
           </a:xfrm>
           <a:prstGeom prst="rect">
             <a:avLst/>
@@ -15698,74 +15769,95 @@
           <a:lstStyle/>
           <a:p>
             <a:r>
-              <a:rPr lang="en-US" sz="1400" dirty="0"/>
-              <a:t>Google for:</a:t>
-            </a:r>
-          </a:p>
-          <a:p>
-            <a:r>
-              <a:rPr lang="en-US" sz="1400" dirty="0" err="1"/>
-              <a:t>Genisys</a:t>
-            </a:r>
-            <a:r>
-              <a:rPr lang="en-US" sz="1400" dirty="0"/>
-              <a:t> 7505 won't start after power outage</a:t>
-            </a:r>
-          </a:p>
-          <a:p>
-            <a:endParaRPr lang="en-US" sz="1400" dirty="0"/>
-          </a:p>
-          <a:p>
-            <a:r>
-              <a:rPr lang="en-US" sz="1400" dirty="0"/>
-              <a:t>Video troubleshooting the 7505</a:t>
-            </a:r>
-          </a:p>
-          <a:p>
-            <a:r>
-              <a:rPr lang="en-US" sz="1400" dirty="0"/>
-              <a:t>.. </a:t>
-            </a:r>
-            <a:r>
-              <a:rPr lang="en-US" sz="1400" dirty="0">
-                <a:hlinkClick r:id="rId2"/>
-              </a:rPr>
-              <a:t>https://</a:t>
-            </a:r>
-            <a:r>
-              <a:rPr lang="en-US" sz="1400" dirty="0" err="1">
-                <a:hlinkClick r:id="rId2"/>
-              </a:rPr>
-              <a:t>www.youtube.com</a:t>
-            </a:r>
-            <a:r>
-              <a:rPr lang="en-US" sz="1400" dirty="0">
-                <a:hlinkClick r:id="rId2"/>
-              </a:rPr>
-              <a:t>/</a:t>
-            </a:r>
-            <a:r>
-              <a:rPr lang="en-US" sz="1400" dirty="0" err="1">
-                <a:hlinkClick r:id="rId2"/>
-              </a:rPr>
-              <a:t>watch?v</a:t>
-            </a:r>
-            <a:r>
-              <a:rPr lang="en-US" sz="1400" dirty="0">
-                <a:hlinkClick r:id="rId2"/>
-              </a:rPr>
-              <a:t>=Wd7vrkUDaz4</a:t>
-            </a:r>
-            <a:endParaRPr lang="en-US" sz="1400" dirty="0"/>
+              <a:rPr lang="en-US" sz="2800" b="1" dirty="0"/>
+              <a:t>Honeywell </a:t>
+            </a:r>
+            <a:r>
+              <a:rPr lang="en-US" sz="2800" b="1" dirty="0" err="1"/>
+              <a:t>Aquastat</a:t>
+            </a:r>
+            <a:endParaRPr lang="en-US" sz="2800" b="1" dirty="0"/>
           </a:p>
         </p:txBody>
       </p:sp>
+      <p:pic>
+        <p:nvPicPr>
+          <p:cNvPr id="4" name="Picture 3">
+            <a:extLst>
+              <a:ext uri="{FF2B5EF4-FFF2-40B4-BE49-F238E27FC236}">
+                <a16:creationId xmlns:a16="http://schemas.microsoft.com/office/drawing/2014/main" id="{0732FA62-7030-9247-BE8B-723131C8932E}"/>
+              </a:ext>
+            </a:extLst>
+          </p:cNvPr>
+          <p:cNvPicPr>
+            <a:picLocks noChangeAspect="1"/>
+          </p:cNvPicPr>
+          <p:nvPr/>
+        </p:nvPicPr>
+        <p:blipFill>
+          <a:blip r:embed="rId2" cstate="email">
+            <a:extLst>
+              <a:ext uri="{28A0092B-C50C-407E-A947-70E740481C1C}">
+                <a14:useLocalDpi xmlns:a14="http://schemas.microsoft.com/office/drawing/2010/main"/>
+              </a:ext>
+            </a:extLst>
+          </a:blip>
+          <a:stretch>
+            <a:fillRect/>
+          </a:stretch>
+        </p:blipFill>
+        <p:spPr>
+          <a:xfrm>
+            <a:off x="181986" y="784000"/>
+            <a:ext cx="4684643" cy="3478768"/>
+          </a:xfrm>
+          <a:prstGeom prst="rect">
+            <a:avLst/>
+          </a:prstGeom>
+        </p:spPr>
+      </p:pic>
+      <p:pic>
+        <p:nvPicPr>
+          <p:cNvPr id="5" name="Picture 4">
+            <a:extLst>
+              <a:ext uri="{FF2B5EF4-FFF2-40B4-BE49-F238E27FC236}">
+                <a16:creationId xmlns:a16="http://schemas.microsoft.com/office/drawing/2014/main" id="{85A35325-3294-89FE-A51B-F55B97BD4191}"/>
+              </a:ext>
+            </a:extLst>
+          </p:cNvPr>
+          <p:cNvPicPr>
+            <a:picLocks noChangeAspect="1"/>
+          </p:cNvPicPr>
+          <p:nvPr/>
+        </p:nvPicPr>
+        <p:blipFill>
+          <a:blip r:embed="rId3" cstate="email">
+            <a:extLst>
+              <a:ext uri="{28A0092B-C50C-407E-A947-70E740481C1C}">
+                <a14:useLocalDpi xmlns:a14="http://schemas.microsoft.com/office/drawing/2010/main"/>
+              </a:ext>
+            </a:extLst>
+          </a:blip>
+          <a:stretch>
+            <a:fillRect/>
+          </a:stretch>
+        </p:blipFill>
+        <p:spPr>
+          <a:xfrm>
+            <a:off x="5743501" y="783999"/>
+            <a:ext cx="2741280" cy="3473423"/>
+          </a:xfrm>
+          <a:prstGeom prst="rect">
+            <a:avLst/>
+          </a:prstGeom>
+        </p:spPr>
+      </p:pic>
       <p:sp>
         <p:nvSpPr>
-          <p:cNvPr id="3" name="TextBox 2">
+          <p:cNvPr id="6" name="TextBox 5">
             <a:extLst>
               <a:ext uri="{FF2B5EF4-FFF2-40B4-BE49-F238E27FC236}">
-                <a16:creationId xmlns:a16="http://schemas.microsoft.com/office/drawing/2014/main" id="{CB9ADDE9-DF0B-0A60-5EC5-FF1A17D6D620}"/>
+                <a16:creationId xmlns:a16="http://schemas.microsoft.com/office/drawing/2014/main" id="{C5DBAFE0-6A0F-1C80-0404-7B2AB38470FC}"/>
               </a:ext>
             </a:extLst>
           </p:cNvPr>
@@ -15774,8 +15866,8 @@
         </p:nvSpPr>
         <p:spPr>
           <a:xfrm>
-            <a:off x="367747" y="2368684"/>
-            <a:ext cx="3002774" cy="307777"/>
+            <a:off x="4327451" y="4646428"/>
+            <a:ext cx="2232837" cy="738664"/>
           </a:xfrm>
           <a:prstGeom prst="rect">
             <a:avLst/>
@@ -15788,9 +15880,355 @@
           </a:bodyPr>
           <a:lstStyle/>
           <a:p>
+            <a:pPr algn="ctr"/>
             <a:r>
               <a:rPr lang="en-US" sz="1400" dirty="0"/>
-              <a:t>Use Google Nest to monitor and reset</a:t>
+              <a:t>Pictures from internet</a:t>
+            </a:r>
+          </a:p>
+          <a:p>
+            <a:pPr algn="ctr"/>
+            <a:r>
+              <a:rPr lang="en-US" sz="1400" dirty="0"/>
+              <a:t>Maybe different model</a:t>
+            </a:r>
+          </a:p>
+          <a:p>
+            <a:pPr algn="ctr"/>
+            <a:r>
+              <a:rPr lang="en-US" sz="1400" dirty="0"/>
+              <a:t>$120</a:t>
+            </a:r>
+          </a:p>
+        </p:txBody>
+      </p:sp>
+    </p:spTree>
+    <p:extLst>
+      <p:ext uri="{BB962C8B-B14F-4D97-AF65-F5344CB8AC3E}">
+        <p14:creationId xmlns:p14="http://schemas.microsoft.com/office/powerpoint/2010/main" val="2756087519"/>
+      </p:ext>
+    </p:extLst>
+  </p:cSld>
+  <p:clrMapOvr>
+    <a:masterClrMapping/>
+  </p:clrMapOvr>
+</p:sld>
+</file>
+
+<file path=ppt/slides/slide5.xml><?xml version="1.0" encoding="utf-8"?>
+<p:sld xmlns:a="http://schemas.openxmlformats.org/drawingml/2006/main" xmlns:r="http://schemas.openxmlformats.org/officeDocument/2006/relationships" xmlns:p="http://schemas.openxmlformats.org/presentationml/2006/main">
+  <p:cSld>
+    <p:spTree>
+      <p:nvGrpSpPr>
+        <p:cNvPr id="1" name=""/>
+        <p:cNvGrpSpPr/>
+        <p:nvPr/>
+      </p:nvGrpSpPr>
+      <p:grpSpPr>
+        <a:xfrm>
+          <a:off x="0" y="0"/>
+          <a:ext cx="0" cy="0"/>
+          <a:chOff x="0" y="0"/>
+          <a:chExt cx="0" cy="0"/>
+        </a:xfrm>
+      </p:grpSpPr>
+      <p:sp>
+        <p:nvSpPr>
+          <p:cNvPr id="2" name="TextBox 1">
+            <a:extLst>
+              <a:ext uri="{FF2B5EF4-FFF2-40B4-BE49-F238E27FC236}">
+                <a16:creationId xmlns:a16="http://schemas.microsoft.com/office/drawing/2014/main" id="{04B19B9A-B50E-0689-D372-15D53E762033}"/>
+              </a:ext>
+            </a:extLst>
+          </p:cNvPr>
+          <p:cNvSpPr txBox="1"/>
+          <p:nvPr/>
+        </p:nvSpPr>
+        <p:spPr>
+          <a:xfrm>
+            <a:off x="83288" y="1126359"/>
+            <a:ext cx="4307959" cy="1169551"/>
+          </a:xfrm>
+          <a:prstGeom prst="rect">
+            <a:avLst/>
+          </a:prstGeom>
+          <a:noFill/>
+        </p:spPr>
+        <p:txBody>
+          <a:bodyPr wrap="square" rtlCol="0">
+            <a:spAutoFit/>
+          </a:bodyPr>
+          <a:lstStyle/>
+          <a:p>
+            <a:r>
+              <a:rPr lang="en-US" sz="1400" dirty="0"/>
+              <a:t>Google for:</a:t>
+            </a:r>
+          </a:p>
+          <a:p>
+            <a:r>
+              <a:rPr lang="en-US" sz="1400" dirty="0" err="1"/>
+              <a:t>Genisys</a:t>
+            </a:r>
+            <a:r>
+              <a:rPr lang="en-US" sz="1400" dirty="0"/>
+              <a:t> 7505 won't start after power outage</a:t>
+            </a:r>
+          </a:p>
+          <a:p>
+            <a:endParaRPr lang="en-US" sz="1400" dirty="0"/>
+          </a:p>
+          <a:p>
+            <a:r>
+              <a:rPr lang="en-US" sz="1400" dirty="0"/>
+              <a:t>Video troubleshooting the 7505</a:t>
+            </a:r>
+          </a:p>
+          <a:p>
+            <a:r>
+              <a:rPr lang="en-US" sz="1400" dirty="0"/>
+              <a:t>.. </a:t>
+            </a:r>
+            <a:r>
+              <a:rPr lang="en-US" sz="1400" dirty="0">
+                <a:hlinkClick r:id="rId2"/>
+              </a:rPr>
+              <a:t>https://</a:t>
+            </a:r>
+            <a:r>
+              <a:rPr lang="en-US" sz="1400" dirty="0" err="1">
+                <a:hlinkClick r:id="rId2"/>
+              </a:rPr>
+              <a:t>www.youtube.com</a:t>
+            </a:r>
+            <a:r>
+              <a:rPr lang="en-US" sz="1400" dirty="0">
+                <a:hlinkClick r:id="rId2"/>
+              </a:rPr>
+              <a:t>/</a:t>
+            </a:r>
+            <a:r>
+              <a:rPr lang="en-US" sz="1400" dirty="0" err="1">
+                <a:hlinkClick r:id="rId2"/>
+              </a:rPr>
+              <a:t>watch?v</a:t>
+            </a:r>
+            <a:r>
+              <a:rPr lang="en-US" sz="1400" dirty="0">
+                <a:hlinkClick r:id="rId2"/>
+              </a:rPr>
+              <a:t>=Wd7vrkUDaz4</a:t>
+            </a:r>
+            <a:endParaRPr lang="en-US" sz="1400" dirty="0"/>
+          </a:p>
+        </p:txBody>
+      </p:sp>
+      <p:pic>
+        <p:nvPicPr>
+          <p:cNvPr id="4" name="Picture 3">
+            <a:extLst>
+              <a:ext uri="{FF2B5EF4-FFF2-40B4-BE49-F238E27FC236}">
+                <a16:creationId xmlns:a16="http://schemas.microsoft.com/office/drawing/2014/main" id="{8C934772-4DEB-8B94-EBB9-1085F4051A39}"/>
+              </a:ext>
+            </a:extLst>
+          </p:cNvPr>
+          <p:cNvPicPr>
+            <a:picLocks noChangeAspect="1"/>
+          </p:cNvPicPr>
+          <p:nvPr/>
+        </p:nvPicPr>
+        <p:blipFill>
+          <a:blip r:embed="rId3" cstate="email">
+            <a:extLst>
+              <a:ext uri="{28A0092B-C50C-407E-A947-70E740481C1C}">
+                <a14:useLocalDpi xmlns:a14="http://schemas.microsoft.com/office/drawing/2010/main"/>
+              </a:ext>
+            </a:extLst>
+          </a:blip>
+          <a:stretch>
+            <a:fillRect/>
+          </a:stretch>
+        </p:blipFill>
+        <p:spPr>
+          <a:xfrm>
+            <a:off x="5156384" y="853885"/>
+            <a:ext cx="1879231" cy="2104501"/>
+          </a:xfrm>
+          <a:prstGeom prst="rect">
+            <a:avLst/>
+          </a:prstGeom>
+        </p:spPr>
+      </p:pic>
+      <p:pic>
+        <p:nvPicPr>
+          <p:cNvPr id="5" name="Picture 4">
+            <a:extLst>
+              <a:ext uri="{FF2B5EF4-FFF2-40B4-BE49-F238E27FC236}">
+                <a16:creationId xmlns:a16="http://schemas.microsoft.com/office/drawing/2014/main" id="{C52DFAD3-0585-574B-7103-CFE5B2D8DC56}"/>
+              </a:ext>
+            </a:extLst>
+          </p:cNvPr>
+          <p:cNvPicPr>
+            <a:picLocks noChangeAspect="1"/>
+          </p:cNvPicPr>
+          <p:nvPr/>
+        </p:nvPicPr>
+        <p:blipFill>
+          <a:blip r:embed="rId4" cstate="email">
+            <a:extLst>
+              <a:ext uri="{28A0092B-C50C-407E-A947-70E740481C1C}">
+                <a14:useLocalDpi xmlns:a14="http://schemas.microsoft.com/office/drawing/2010/main"/>
+              </a:ext>
+            </a:extLst>
+          </a:blip>
+          <a:stretch>
+            <a:fillRect/>
+          </a:stretch>
+        </p:blipFill>
+        <p:spPr>
+          <a:xfrm>
+            <a:off x="7699301" y="848569"/>
+            <a:ext cx="3619500" cy="3543300"/>
+          </a:xfrm>
+          <a:prstGeom prst="rect">
+            <a:avLst/>
+          </a:prstGeom>
+        </p:spPr>
+      </p:pic>
+      <p:pic>
+        <p:nvPicPr>
+          <p:cNvPr id="6" name="Picture 5">
+            <a:extLst>
+              <a:ext uri="{FF2B5EF4-FFF2-40B4-BE49-F238E27FC236}">
+                <a16:creationId xmlns:a16="http://schemas.microsoft.com/office/drawing/2014/main" id="{3E5EF694-94BF-68B8-9F75-42F66F75A4C0}"/>
+              </a:ext>
+            </a:extLst>
+          </p:cNvPr>
+          <p:cNvPicPr>
+            <a:picLocks noChangeAspect="1"/>
+          </p:cNvPicPr>
+          <p:nvPr/>
+        </p:nvPicPr>
+        <p:blipFill>
+          <a:blip r:embed="rId5" cstate="email">
+            <a:extLst>
+              <a:ext uri="{28A0092B-C50C-407E-A947-70E740481C1C}">
+                <a14:useLocalDpi xmlns:a14="http://schemas.microsoft.com/office/drawing/2010/main"/>
+              </a:ext>
+            </a:extLst>
+          </a:blip>
+          <a:stretch>
+            <a:fillRect/>
+          </a:stretch>
+        </p:blipFill>
+        <p:spPr>
+          <a:xfrm>
+            <a:off x="83288" y="3413542"/>
+            <a:ext cx="6012712" cy="3342151"/>
+          </a:xfrm>
+          <a:prstGeom prst="rect">
+            <a:avLst/>
+          </a:prstGeom>
+        </p:spPr>
+      </p:pic>
+      <p:sp>
+        <p:nvSpPr>
+          <p:cNvPr id="7" name="TextBox 6">
+            <a:extLst>
+              <a:ext uri="{FF2B5EF4-FFF2-40B4-BE49-F238E27FC236}">
+                <a16:creationId xmlns:a16="http://schemas.microsoft.com/office/drawing/2014/main" id="{DD571962-2A19-077E-C34A-D6933E460260}"/>
+              </a:ext>
+            </a:extLst>
+          </p:cNvPr>
+          <p:cNvSpPr txBox="1"/>
+          <p:nvPr/>
+        </p:nvSpPr>
+        <p:spPr>
+          <a:xfrm>
+            <a:off x="0" y="0"/>
+            <a:ext cx="5286924" cy="523220"/>
+          </a:xfrm>
+          <a:prstGeom prst="rect">
+            <a:avLst/>
+          </a:prstGeom>
+          <a:noFill/>
+        </p:spPr>
+        <p:txBody>
+          <a:bodyPr wrap="square" rtlCol="0">
+            <a:spAutoFit/>
+          </a:bodyPr>
+          <a:lstStyle/>
+          <a:p>
+            <a:r>
+              <a:rPr lang="en-US" sz="2800" b="1" dirty="0"/>
+              <a:t>Troubleshooting  </a:t>
+            </a:r>
+            <a:r>
+              <a:rPr lang="en-US" sz="2800" b="1" dirty="0" err="1"/>
+              <a:t>Genisys</a:t>
+            </a:r>
+            <a:r>
+              <a:rPr lang="en-US" sz="2800" b="1" dirty="0"/>
+              <a:t> 7505 </a:t>
+            </a:r>
+          </a:p>
+        </p:txBody>
+      </p:sp>
+      <p:sp>
+        <p:nvSpPr>
+          <p:cNvPr id="8" name="TextBox 7">
+            <a:extLst>
+              <a:ext uri="{FF2B5EF4-FFF2-40B4-BE49-F238E27FC236}">
+                <a16:creationId xmlns:a16="http://schemas.microsoft.com/office/drawing/2014/main" id="{E420B81A-CE5A-82C1-7D2D-56C964B9663D}"/>
+              </a:ext>
+            </a:extLst>
+          </p:cNvPr>
+          <p:cNvSpPr txBox="1"/>
+          <p:nvPr/>
+        </p:nvSpPr>
+        <p:spPr>
+          <a:xfrm>
+            <a:off x="7289061" y="5084617"/>
+            <a:ext cx="3923414" cy="954107"/>
+          </a:xfrm>
+          <a:prstGeom prst="rect">
+            <a:avLst/>
+          </a:prstGeom>
+          <a:noFill/>
+        </p:spPr>
+        <p:txBody>
+          <a:bodyPr wrap="square" rtlCol="0">
+            <a:spAutoFit/>
+          </a:bodyPr>
+          <a:lstStyle/>
+          <a:p>
+            <a:pPr marL="285750" indent="-285750">
+              <a:buFont typeface="Arial" panose="020B0604020202020204" pitchFamily="34" charset="0"/>
+              <a:buChar char="•"/>
+            </a:pPr>
+            <a:r>
+              <a:rPr lang="en-US" sz="1400" dirty="0"/>
+              <a:t>Checks for flame presence</a:t>
+            </a:r>
+          </a:p>
+          <a:p>
+            <a:pPr marL="285750" indent="-285750">
+              <a:buFont typeface="Arial" panose="020B0604020202020204" pitchFamily="34" charset="0"/>
+              <a:buChar char="•"/>
+            </a:pPr>
+            <a:r>
+              <a:rPr lang="en-US" sz="1400" dirty="0"/>
+              <a:t>Ignites – and checks that it is ignited</a:t>
+            </a:r>
+          </a:p>
+          <a:p>
+            <a:pPr marL="285750" indent="-285750">
+              <a:buFont typeface="Arial" panose="020B0604020202020204" pitchFamily="34" charset="0"/>
+              <a:buChar char="•"/>
+            </a:pPr>
+            <a:r>
+              <a:rPr lang="en-US" sz="1400" dirty="0"/>
+              <a:t>reacts to signal "more heat" to start/stop blower (and shut off the valve)</a:t>
             </a:r>
           </a:p>
         </p:txBody>
@@ -15799,6 +16237,312 @@
     <p:extLst>
       <p:ext uri="{BB962C8B-B14F-4D97-AF65-F5344CB8AC3E}">
         <p14:creationId xmlns:p14="http://schemas.microsoft.com/office/powerpoint/2010/main" val="1641499685"/>
+      </p:ext>
+    </p:extLst>
+  </p:cSld>
+  <p:clrMapOvr>
+    <a:masterClrMapping/>
+  </p:clrMapOvr>
+</p:sld>
+</file>
+
+<file path=ppt/slides/slide6.xml><?xml version="1.0" encoding="utf-8"?>
+<p:sld xmlns:a="http://schemas.openxmlformats.org/drawingml/2006/main" xmlns:r="http://schemas.openxmlformats.org/officeDocument/2006/relationships" xmlns:p="http://schemas.openxmlformats.org/presentationml/2006/main">
+  <p:cSld>
+    <p:spTree>
+      <p:nvGrpSpPr>
+        <p:cNvPr id="1" name=""/>
+        <p:cNvGrpSpPr/>
+        <p:nvPr/>
+      </p:nvGrpSpPr>
+      <p:grpSpPr>
+        <a:xfrm>
+          <a:off x="0" y="0"/>
+          <a:ext cx="0" cy="0"/>
+          <a:chOff x="0" y="0"/>
+          <a:chExt cx="0" cy="0"/>
+        </a:xfrm>
+      </p:grpSpPr>
+      <p:sp>
+        <p:nvSpPr>
+          <p:cNvPr id="2" name="TextBox 1">
+            <a:extLst>
+              <a:ext uri="{FF2B5EF4-FFF2-40B4-BE49-F238E27FC236}">
+                <a16:creationId xmlns:a16="http://schemas.microsoft.com/office/drawing/2014/main" id="{04B19B9A-B50E-0689-D372-15D53E762033}"/>
+              </a:ext>
+            </a:extLst>
+          </p:cNvPr>
+          <p:cNvSpPr txBox="1"/>
+          <p:nvPr/>
+        </p:nvSpPr>
+        <p:spPr>
+          <a:xfrm>
+            <a:off x="0" y="626105"/>
+            <a:ext cx="4593265" cy="1384995"/>
+          </a:xfrm>
+          <a:prstGeom prst="rect">
+            <a:avLst/>
+          </a:prstGeom>
+          <a:noFill/>
+        </p:spPr>
+        <p:txBody>
+          <a:bodyPr wrap="square" rtlCol="0">
+            <a:spAutoFit/>
+          </a:bodyPr>
+          <a:lstStyle/>
+          <a:p>
+            <a:r>
+              <a:rPr lang="en-US" sz="1400" dirty="0"/>
+              <a:t>Google Nest Thermostat:</a:t>
+            </a:r>
+          </a:p>
+          <a:p>
+            <a:r>
+              <a:rPr lang="en-US" sz="1400" dirty="0"/>
+              <a:t>.. </a:t>
+            </a:r>
+            <a:r>
+              <a:rPr lang="en-US" sz="1400" dirty="0">
+                <a:hlinkClick r:id="rId2"/>
+              </a:rPr>
+              <a:t>https://</a:t>
+            </a:r>
+            <a:r>
+              <a:rPr lang="en-US" sz="1400" dirty="0" err="1">
+                <a:hlinkClick r:id="rId2"/>
+              </a:rPr>
+              <a:t>store.google.com</a:t>
+            </a:r>
+            <a:r>
+              <a:rPr lang="en-US" sz="1400" dirty="0">
+                <a:hlinkClick r:id="rId2"/>
+              </a:rPr>
+              <a:t>/us/product/</a:t>
+            </a:r>
+            <a:r>
+              <a:rPr lang="en-US" sz="1400" dirty="0" err="1">
+                <a:hlinkClick r:id="rId2"/>
+              </a:rPr>
+              <a:t>nest_thermostat</a:t>
+            </a:r>
+            <a:endParaRPr lang="en-US" sz="1400" dirty="0"/>
+          </a:p>
+          <a:p>
+            <a:r>
+              <a:rPr lang="en-US" sz="1400" dirty="0"/>
+              <a:t>Nest </a:t>
+            </a:r>
+            <a:r>
+              <a:rPr lang="en-US" sz="1400" dirty="0" err="1"/>
+              <a:t>Wifi</a:t>
+            </a:r>
+            <a:r>
+              <a:rPr lang="en-US" sz="1400" dirty="0"/>
+              <a:t> requires a Nest </a:t>
+            </a:r>
+            <a:r>
+              <a:rPr lang="en-US" sz="1400" dirty="0" err="1"/>
+              <a:t>Wifi</a:t>
+            </a:r>
+            <a:r>
+              <a:rPr lang="en-US" sz="1400" dirty="0"/>
+              <a:t> router (or Google </a:t>
+            </a:r>
+            <a:r>
+              <a:rPr lang="en-US" sz="1400" dirty="0" err="1"/>
+              <a:t>WiFi</a:t>
+            </a:r>
+            <a:r>
+              <a:rPr lang="en-US" sz="1400" dirty="0"/>
+              <a:t>)</a:t>
+            </a:r>
+          </a:p>
+          <a:p>
+            <a:r>
+              <a:rPr lang="en-US" sz="1400" dirty="0"/>
+              <a:t>Latest - Nest </a:t>
+            </a:r>
+            <a:r>
+              <a:rPr lang="en-US" sz="1400" dirty="0" err="1"/>
+              <a:t>Wifi</a:t>
+            </a:r>
+            <a:r>
+              <a:rPr lang="en-US" sz="1400" dirty="0"/>
+              <a:t> Pro router ($200)</a:t>
+            </a:r>
+          </a:p>
+          <a:p>
+            <a:endParaRPr lang="en-US" sz="1400" dirty="0"/>
+          </a:p>
+          <a:p>
+            <a:r>
+              <a:rPr lang="en-US" sz="1400" dirty="0"/>
+              <a:t>The devices are controlled using Google Home App</a:t>
+            </a:r>
+          </a:p>
+        </p:txBody>
+      </p:sp>
+      <p:sp>
+        <p:nvSpPr>
+          <p:cNvPr id="5" name="TextBox 4">
+            <a:extLst>
+              <a:ext uri="{FF2B5EF4-FFF2-40B4-BE49-F238E27FC236}">
+                <a16:creationId xmlns:a16="http://schemas.microsoft.com/office/drawing/2014/main" id="{AAA13167-72BE-3016-0C51-F732F7A64CA4}"/>
+              </a:ext>
+            </a:extLst>
+          </p:cNvPr>
+          <p:cNvSpPr txBox="1"/>
+          <p:nvPr/>
+        </p:nvSpPr>
+        <p:spPr>
+          <a:xfrm>
+            <a:off x="0" y="0"/>
+            <a:ext cx="5286924" cy="523220"/>
+          </a:xfrm>
+          <a:prstGeom prst="rect">
+            <a:avLst/>
+          </a:prstGeom>
+          <a:noFill/>
+        </p:spPr>
+        <p:txBody>
+          <a:bodyPr wrap="square" rtlCol="0">
+            <a:spAutoFit/>
+          </a:bodyPr>
+          <a:lstStyle/>
+          <a:p>
+            <a:r>
+              <a:rPr lang="en-US" sz="2800" b="1" dirty="0"/>
+              <a:t>Google Nest</a:t>
+            </a:r>
+          </a:p>
+        </p:txBody>
+      </p:sp>
+      <p:pic>
+        <p:nvPicPr>
+          <p:cNvPr id="7" name="Picture 6">
+            <a:extLst>
+              <a:ext uri="{FF2B5EF4-FFF2-40B4-BE49-F238E27FC236}">
+                <a16:creationId xmlns:a16="http://schemas.microsoft.com/office/drawing/2014/main" id="{B7FBCC3C-D46C-0DDE-CB4B-9571E8F72043}"/>
+              </a:ext>
+            </a:extLst>
+          </p:cNvPr>
+          <p:cNvPicPr>
+            <a:picLocks noChangeAspect="1"/>
+          </p:cNvPicPr>
+          <p:nvPr/>
+        </p:nvPicPr>
+        <p:blipFill>
+          <a:blip r:embed="rId3" cstate="email">
+            <a:extLst>
+              <a:ext uri="{28A0092B-C50C-407E-A947-70E740481C1C}">
+                <a14:useLocalDpi xmlns:a14="http://schemas.microsoft.com/office/drawing/2010/main"/>
+              </a:ext>
+            </a:extLst>
+          </a:blip>
+          <a:stretch>
+            <a:fillRect/>
+          </a:stretch>
+        </p:blipFill>
+        <p:spPr>
+          <a:xfrm>
+            <a:off x="7825562" y="110663"/>
+            <a:ext cx="4272517" cy="3075418"/>
+          </a:xfrm>
+          <a:prstGeom prst="rect">
+            <a:avLst/>
+          </a:prstGeom>
+        </p:spPr>
+      </p:pic>
+      <p:pic>
+        <p:nvPicPr>
+          <p:cNvPr id="8" name="Picture 7">
+            <a:extLst>
+              <a:ext uri="{FF2B5EF4-FFF2-40B4-BE49-F238E27FC236}">
+                <a16:creationId xmlns:a16="http://schemas.microsoft.com/office/drawing/2014/main" id="{1B0A6DBD-29A9-3B38-8B50-C2D85C70CF7E}"/>
+              </a:ext>
+            </a:extLst>
+          </p:cNvPr>
+          <p:cNvPicPr>
+            <a:picLocks noChangeAspect="1"/>
+          </p:cNvPicPr>
+          <p:nvPr/>
+        </p:nvPicPr>
+        <p:blipFill>
+          <a:blip r:embed="rId4" cstate="email">
+            <a:extLst>
+              <a:ext uri="{28A0092B-C50C-407E-A947-70E740481C1C}">
+                <a14:useLocalDpi xmlns:a14="http://schemas.microsoft.com/office/drawing/2010/main"/>
+              </a:ext>
+            </a:extLst>
+          </a:blip>
+          <a:stretch>
+            <a:fillRect/>
+          </a:stretch>
+        </p:blipFill>
+        <p:spPr>
+          <a:xfrm>
+            <a:off x="93921" y="2113985"/>
+            <a:ext cx="4850218" cy="1353874"/>
+          </a:xfrm>
+          <a:prstGeom prst="rect">
+            <a:avLst/>
+          </a:prstGeom>
+        </p:spPr>
+      </p:pic>
+      <p:sp>
+        <p:nvSpPr>
+          <p:cNvPr id="9" name="TextBox 8">
+            <a:extLst>
+              <a:ext uri="{FF2B5EF4-FFF2-40B4-BE49-F238E27FC236}">
+                <a16:creationId xmlns:a16="http://schemas.microsoft.com/office/drawing/2014/main" id="{0F9F5ADA-B0FF-0732-50FB-9A5260346F8C}"/>
+              </a:ext>
+            </a:extLst>
+          </p:cNvPr>
+          <p:cNvSpPr txBox="1"/>
+          <p:nvPr/>
+        </p:nvSpPr>
+        <p:spPr>
+          <a:xfrm>
+            <a:off x="93921" y="3601865"/>
+            <a:ext cx="5286924" cy="261610"/>
+          </a:xfrm>
+          <a:prstGeom prst="rect">
+            <a:avLst/>
+          </a:prstGeom>
+          <a:noFill/>
+        </p:spPr>
+        <p:txBody>
+          <a:bodyPr wrap="square" rtlCol="0">
+            <a:spAutoFit/>
+          </a:bodyPr>
+          <a:lstStyle/>
+          <a:p>
+            <a:r>
+              <a:rPr lang="en-US" sz="1100" dirty="0">
+                <a:hlinkClick r:id="rId5"/>
+              </a:rPr>
+              <a:t>https://</a:t>
+            </a:r>
+            <a:r>
+              <a:rPr lang="en-US" sz="1100" dirty="0" err="1">
+                <a:hlinkClick r:id="rId5"/>
+              </a:rPr>
+              <a:t>www.cnet.com</a:t>
+            </a:r>
+            <a:r>
+              <a:rPr lang="en-US" sz="1100" dirty="0">
+                <a:hlinkClick r:id="rId5"/>
+              </a:rPr>
+              <a:t>/home/internet/nest-wifi-vs-nest-wifi-pro-wi-fi-6e-mesh-routers/</a:t>
+            </a:r>
+            <a:endParaRPr lang="en-US" sz="1100" dirty="0"/>
+          </a:p>
+        </p:txBody>
+      </p:sp>
+    </p:spTree>
+    <p:extLst>
+      <p:ext uri="{BB962C8B-B14F-4D97-AF65-F5344CB8AC3E}">
+        <p14:creationId xmlns:p14="http://schemas.microsoft.com/office/powerpoint/2010/main" val="1487251249"/>
       </p:ext>
     </p:extLst>
   </p:cSld>
